--- a/ClinicalTrials_KG.pptx
+++ b/ClinicalTrials_KG.pptx
@@ -2733,13 +2733,13 @@
         <a:lstStyle/>
         <a:p>
           <a:r>
-            <a:rPr lang="en-IN" sz="900" b="1" i="0">
+            <a:rPr lang="en-IN" sz="900" b="1" i="0" dirty="0">
               <a:solidFill>
                 <a:schemeClr val="bg1"/>
               </a:solidFill>
               <a:latin typeface="+mn-lt"/>
             </a:rPr>
-            <a:t>Network &amp; Graph</a:t>
+            <a:t>Network &amp; Graph analysis</a:t>
           </a:r>
           <a:endParaRPr lang="en-IN" sz="900" b="1" dirty="0">
             <a:solidFill>
@@ -3591,13 +3591,13 @@
             <a:buNone/>
           </a:pPr>
           <a:r>
-            <a:rPr lang="en-IN" sz="900" b="1" i="0" kern="1200">
+            <a:rPr lang="en-IN" sz="900" b="1" i="0" kern="1200" dirty="0">
               <a:solidFill>
                 <a:schemeClr val="bg1"/>
               </a:solidFill>
               <a:latin typeface="+mn-lt"/>
             </a:rPr>
-            <a:t>Network &amp; Graph</a:t>
+            <a:t>Network &amp; Graph analysis</a:t>
           </a:r>
           <a:endParaRPr lang="en-IN" sz="900" b="1" kern="1200" dirty="0">
             <a:solidFill>
@@ -9516,7 +9516,7 @@
           <p:nvPr>
             <p:extLst>
               <p:ext uri="{D42A27DB-BD31-4B8C-83A1-F6EECF244321}">
-                <p14:modId xmlns:p14="http://schemas.microsoft.com/office/powerpoint/2010/main" val="1969572706"/>
+                <p14:modId xmlns:p14="http://schemas.microsoft.com/office/powerpoint/2010/main" val="4018751907"/>
               </p:ext>
             </p:extLst>
           </p:nvPr>
@@ -19202,7 +19202,7 @@
         </p:nvSpPr>
         <p:spPr>
           <a:xfrm>
-            <a:off x="0" y="0"/>
+            <a:off x="-9838" y="0"/>
             <a:ext cx="9144000" cy="777240"/>
           </a:xfrm>
           <a:prstGeom prst="rect">
